--- a/hitchhikers-guide-upgrade-to-26ai/images.pptx
+++ b/hitchhikers-guide-upgrade-to-26ai/images.pptx
@@ -273,7 +273,7 @@
           <a:p>
             <a:fld id="{FA771A58-70AE-9C45-8B71-AD8B3BA78DA7}" type="datetimeFigureOut">
               <a:rPr lang="en-US" smtClean="0"/>
-              <a:t>8/17/26</a:t>
+              <a:t>9/16/26</a:t>
             </a:fld>
             <a:endParaRPr lang="en-US"/>
           </a:p>
@@ -473,7 +473,7 @@
           <a:p>
             <a:fld id="{FA771A58-70AE-9C45-8B71-AD8B3BA78DA7}" type="datetimeFigureOut">
               <a:rPr lang="en-US" smtClean="0"/>
-              <a:t>8/17/26</a:t>
+              <a:t>9/16/26</a:t>
             </a:fld>
             <a:endParaRPr lang="en-US"/>
           </a:p>
@@ -683,7 +683,7 @@
           <a:p>
             <a:fld id="{FA771A58-70AE-9C45-8B71-AD8B3BA78DA7}" type="datetimeFigureOut">
               <a:rPr lang="en-US" smtClean="0"/>
-              <a:t>8/17/26</a:t>
+              <a:t>9/16/26</a:t>
             </a:fld>
             <a:endParaRPr lang="en-US"/>
           </a:p>
@@ -883,7 +883,7 @@
           <a:p>
             <a:fld id="{FA771A58-70AE-9C45-8B71-AD8B3BA78DA7}" type="datetimeFigureOut">
               <a:rPr lang="en-US" smtClean="0"/>
-              <a:t>8/17/26</a:t>
+              <a:t>9/16/26</a:t>
             </a:fld>
             <a:endParaRPr lang="en-US"/>
           </a:p>
@@ -1159,7 +1159,7 @@
           <a:p>
             <a:fld id="{FA771A58-70AE-9C45-8B71-AD8B3BA78DA7}" type="datetimeFigureOut">
               <a:rPr lang="en-US" smtClean="0"/>
-              <a:t>8/17/26</a:t>
+              <a:t>9/16/26</a:t>
             </a:fld>
             <a:endParaRPr lang="en-US"/>
           </a:p>
@@ -1427,7 +1427,7 @@
           <a:p>
             <a:fld id="{FA771A58-70AE-9C45-8B71-AD8B3BA78DA7}" type="datetimeFigureOut">
               <a:rPr lang="en-US" smtClean="0"/>
-              <a:t>8/17/26</a:t>
+              <a:t>9/16/26</a:t>
             </a:fld>
             <a:endParaRPr lang="en-US"/>
           </a:p>
@@ -1842,7 +1842,7 @@
           <a:p>
             <a:fld id="{FA771A58-70AE-9C45-8B71-AD8B3BA78DA7}" type="datetimeFigureOut">
               <a:rPr lang="en-US" smtClean="0"/>
-              <a:t>8/17/26</a:t>
+              <a:t>9/16/26</a:t>
             </a:fld>
             <a:endParaRPr lang="en-US"/>
           </a:p>
@@ -1984,7 +1984,7 @@
           <a:p>
             <a:fld id="{FA771A58-70AE-9C45-8B71-AD8B3BA78DA7}" type="datetimeFigureOut">
               <a:rPr lang="en-US" smtClean="0"/>
-              <a:t>8/17/26</a:t>
+              <a:t>9/16/26</a:t>
             </a:fld>
             <a:endParaRPr lang="en-US"/>
           </a:p>
@@ -2097,7 +2097,7 @@
           <a:p>
             <a:fld id="{FA771A58-70AE-9C45-8B71-AD8B3BA78DA7}" type="datetimeFigureOut">
               <a:rPr lang="en-US" smtClean="0"/>
-              <a:t>8/17/26</a:t>
+              <a:t>9/16/26</a:t>
             </a:fld>
             <a:endParaRPr lang="en-US"/>
           </a:p>
@@ -2410,7 +2410,7 @@
           <a:p>
             <a:fld id="{FA771A58-70AE-9C45-8B71-AD8B3BA78DA7}" type="datetimeFigureOut">
               <a:rPr lang="en-US" smtClean="0"/>
-              <a:t>8/17/26</a:t>
+              <a:t>9/16/26</a:t>
             </a:fld>
             <a:endParaRPr lang="en-US"/>
           </a:p>
@@ -2699,7 +2699,7 @@
           <a:p>
             <a:fld id="{FA771A58-70AE-9C45-8B71-AD8B3BA78DA7}" type="datetimeFigureOut">
               <a:rPr lang="en-US" smtClean="0"/>
-              <a:t>8/17/26</a:t>
+              <a:t>9/16/26</a:t>
             </a:fld>
             <a:endParaRPr lang="en-US"/>
           </a:p>
@@ -2942,7 +2942,7 @@
           <a:p>
             <a:fld id="{FA771A58-70AE-9C45-8B71-AD8B3BA78DA7}" type="datetimeFigureOut">
               <a:rPr lang="en-US" smtClean="0"/>
-              <a:t>8/17/26</a:t>
+              <a:t>9/16/26</a:t>
             </a:fld>
             <a:endParaRPr lang="en-US"/>
           </a:p>
@@ -3712,14 +3712,14 @@
           <p:nvPr>
             <p:extLst>
               <p:ext uri="{D42A27DB-BD31-4B8C-83A1-F6EECF244321}">
-                <p14:modId xmlns:p14="http://schemas.microsoft.com/office/powerpoint/2010/main" val="3563956893"/>
+                <p14:modId xmlns:p14="http://schemas.microsoft.com/office/powerpoint/2010/main" val="3482016558"/>
               </p:ext>
             </p:extLst>
           </p:nvPr>
         </p:nvGraphicFramePr>
         <p:xfrm>
           <a:off x="1361661" y="344716"/>
-          <a:ext cx="9705838" cy="6454060"/>
+          <a:ext cx="9705838" cy="5739497"/>
         </p:xfrm>
         <a:graphic>
           <a:graphicData uri="http://schemas.openxmlformats.org/drawingml/2006/table">
@@ -4376,301 +4376,6 @@
                   </a:ext>
                 </a:extLst>
               </a:tr>
-              <a:tr h="714563">
-                <a:tc>
-                  <a:txBody>
-                    <a:bodyPr/>
-                    <a:lstStyle/>
-                    <a:p>
-                      <a:pPr marL="0" marR="0" lvl="0" indent="0" algn="l" defTabSz="914400" rtl="0" eaLnBrk="1" fontAlgn="auto" latinLnBrk="0" hangingPunct="1">
-                        <a:lnSpc>
-                          <a:spcPct val="100000"/>
-                        </a:lnSpc>
-                        <a:spcBef>
-                          <a:spcPts val="0"/>
-                        </a:spcBef>
-                        <a:spcAft>
-                          <a:spcPts val="0"/>
-                        </a:spcAft>
-                        <a:buClrTx/>
-                        <a:buSzTx/>
-                        <a:buFontTx/>
-                        <a:buNone/>
-                        <a:tabLst/>
-                        <a:defRPr/>
-                      </a:pPr>
-                      <a:r>
-                        <a:rPr lang="en-US" sz="1600" b="1" i="0" kern="1200" dirty="0">
-                          <a:solidFill>
-                            <a:schemeClr val="tx1"/>
-                          </a:solidFill>
-                          <a:latin typeface="Oracle Sans Semi Bold" panose="020B0503020204020204" pitchFamily="34" charset="0"/>
-                          <a:ea typeface="+mn-ea"/>
-                          <a:cs typeface="Oracle Sans Semi Bold" panose="020B0503020204020204" pitchFamily="34" charset="0"/>
-                        </a:rPr>
-                        <a:t>Oracle Database 21c</a:t>
-                      </a:r>
-                      <a:br>
-                        <a:rPr lang="en-US" sz="1600" b="1" i="0" kern="1200" dirty="0">
-                          <a:solidFill>
-                            <a:schemeClr val="tx1"/>
-                          </a:solidFill>
-                          <a:latin typeface="Oracle Sans Semi Bold" panose="020B0503020204020204" pitchFamily="34" charset="0"/>
-                          <a:ea typeface="+mn-ea"/>
-                          <a:cs typeface="Oracle Sans Semi Bold" panose="020B0503020204020204" pitchFamily="34" charset="0"/>
-                        </a:rPr>
-                      </a:br>
-                      <a:r>
-                        <a:rPr lang="en-US" sz="1100" b="0" i="0" kern="1200" dirty="0">
-                          <a:solidFill>
-                            <a:schemeClr val="tx1"/>
-                          </a:solidFill>
-                          <a:latin typeface="Consolas" panose="020B0609020204030204" pitchFamily="49" charset="0"/>
-                          <a:ea typeface="+mn-ea"/>
-                          <a:cs typeface="Consolas" panose="020B0609020204030204" pitchFamily="49" charset="0"/>
-                        </a:rPr>
-                        <a:t>/u01/app/oracle/product/21</a:t>
-                      </a:r>
-                    </a:p>
-                  </a:txBody>
-                  <a:tcPr anchor="ctr">
-                    <a:lnL w="12700" cap="flat" cmpd="sng" algn="ctr">
-                      <a:solidFill>
-                        <a:schemeClr val="tx1"/>
-                      </a:solidFill>
-                      <a:prstDash val="solid"/>
-                      <a:round/>
-                      <a:headEnd type="none" w="med" len="med"/>
-                      <a:tailEnd type="none" w="med" len="med"/>
-                    </a:lnL>
-                    <a:lnR w="12700" cap="flat" cmpd="sng" algn="ctr">
-                      <a:solidFill>
-                        <a:schemeClr val="tx1"/>
-                      </a:solidFill>
-                      <a:prstDash val="solid"/>
-                      <a:round/>
-                      <a:headEnd type="none" w="med" len="med"/>
-                      <a:tailEnd type="none" w="med" len="med"/>
-                    </a:lnR>
-                    <a:lnT w="12700" cap="flat" cmpd="sng" algn="ctr">
-                      <a:solidFill>
-                        <a:schemeClr val="tx1"/>
-                      </a:solidFill>
-                      <a:prstDash val="solid"/>
-                      <a:round/>
-                      <a:headEnd type="none" w="med" len="med"/>
-                      <a:tailEnd type="none" w="med" len="med"/>
-                    </a:lnT>
-                    <a:lnB w="12700" cap="flat" cmpd="sng" algn="ctr">
-                      <a:solidFill>
-                        <a:schemeClr val="tx1"/>
-                      </a:solidFill>
-                      <a:prstDash val="solid"/>
-                      <a:round/>
-                      <a:headEnd type="none" w="med" len="med"/>
-                      <a:tailEnd type="none" w="med" len="med"/>
-                    </a:lnB>
-                    <a:solidFill>
-                      <a:schemeClr val="accent6">
-                        <a:lumMod val="20000"/>
-                        <a:lumOff val="80000"/>
-                      </a:schemeClr>
-                    </a:solidFill>
-                  </a:tcPr>
-                </a:tc>
-                <a:tc>
-                  <a:txBody>
-                    <a:bodyPr/>
-                    <a:lstStyle/>
-                    <a:p>
-                      <a:endParaRPr lang="en-US" b="1" i="0" dirty="0">
-                        <a:solidFill>
-                          <a:schemeClr val="tx1"/>
-                        </a:solidFill>
-                        <a:latin typeface="Oracle Sans Semi Bold" panose="020B0503020204020204" pitchFamily="34" charset="0"/>
-                        <a:cs typeface="Oracle Sans Semi Bold" panose="020B0503020204020204" pitchFamily="34" charset="0"/>
-                      </a:endParaRPr>
-                    </a:p>
-                  </a:txBody>
-                  <a:tcPr>
-                    <a:lnL w="12700" cap="flat" cmpd="sng" algn="ctr">
-                      <a:solidFill>
-                        <a:schemeClr val="tx1"/>
-                      </a:solidFill>
-                      <a:prstDash val="solid"/>
-                      <a:round/>
-                      <a:headEnd type="none" w="med" len="med"/>
-                      <a:tailEnd type="none" w="med" len="med"/>
-                    </a:lnL>
-                    <a:lnR w="12700" cap="flat" cmpd="sng" algn="ctr">
-                      <a:noFill/>
-                      <a:prstDash val="solid"/>
-                      <a:round/>
-                      <a:headEnd type="none" w="med" len="med"/>
-                      <a:tailEnd type="none" w="med" len="med"/>
-                    </a:lnR>
-                    <a:lnT w="12700" cap="flat" cmpd="sng" algn="ctr">
-                      <a:solidFill>
-                        <a:schemeClr val="tx1"/>
-                      </a:solidFill>
-                      <a:prstDash val="solid"/>
-                      <a:round/>
-                      <a:headEnd type="none" w="med" len="med"/>
-                      <a:tailEnd type="none" w="med" len="med"/>
-                    </a:lnT>
-                    <a:lnB w="12700" cap="flat" cmpd="sng" algn="ctr">
-                      <a:solidFill>
-                        <a:schemeClr val="tx1"/>
-                      </a:solidFill>
-                      <a:prstDash val="solid"/>
-                      <a:round/>
-                      <a:headEnd type="none" w="med" len="med"/>
-                      <a:tailEnd type="none" w="med" len="med"/>
-                    </a:lnB>
-                    <a:lnTlToBr w="12700" cmpd="sng">
-                      <a:noFill/>
-                      <a:prstDash val="solid"/>
-                    </a:lnTlToBr>
-                    <a:lnBlToTr w="12700" cmpd="sng">
-                      <a:noFill/>
-                      <a:prstDash val="solid"/>
-                    </a:lnBlToTr>
-                    <a:solidFill>
-                      <a:schemeClr val="bg1"/>
-                    </a:solidFill>
-                  </a:tcPr>
-                </a:tc>
-                <a:tc>
-                  <a:txBody>
-                    <a:bodyPr/>
-                    <a:lstStyle/>
-                    <a:p>
-                      <a:endParaRPr lang="en-US" b="1" i="0" dirty="0">
-                        <a:solidFill>
-                          <a:schemeClr val="tx1"/>
-                        </a:solidFill>
-                        <a:latin typeface="Oracle Sans Semi Bold" panose="020B0503020204020204" pitchFamily="34" charset="0"/>
-                        <a:cs typeface="Oracle Sans Semi Bold" panose="020B0503020204020204" pitchFamily="34" charset="0"/>
-                      </a:endParaRPr>
-                    </a:p>
-                  </a:txBody>
-                  <a:tcPr>
-                    <a:lnL w="12700" cap="flat" cmpd="sng" algn="ctr">
-                      <a:noFill/>
-                      <a:prstDash val="solid"/>
-                      <a:round/>
-                      <a:headEnd type="none" w="med" len="med"/>
-                      <a:tailEnd type="none" w="med" len="med"/>
-                    </a:lnL>
-                    <a:lnR w="12700" cap="flat" cmpd="sng" algn="ctr">
-                      <a:noFill/>
-                      <a:prstDash val="solid"/>
-                      <a:round/>
-                      <a:headEnd type="none" w="med" len="med"/>
-                      <a:tailEnd type="none" w="med" len="med"/>
-                    </a:lnR>
-                    <a:lnT w="12700" cap="flat" cmpd="sng" algn="ctr">
-                      <a:solidFill>
-                        <a:schemeClr val="tx1"/>
-                      </a:solidFill>
-                      <a:prstDash val="solid"/>
-                      <a:round/>
-                      <a:headEnd type="none" w="med" len="med"/>
-                      <a:tailEnd type="none" w="med" len="med"/>
-                    </a:lnT>
-                    <a:lnB w="12700" cap="flat" cmpd="sng" algn="ctr">
-                      <a:solidFill>
-                        <a:schemeClr val="tx1"/>
-                      </a:solidFill>
-                      <a:prstDash val="solid"/>
-                      <a:round/>
-                      <a:headEnd type="none" w="med" len="med"/>
-                      <a:tailEnd type="none" w="med" len="med"/>
-                    </a:lnB>
-                    <a:lnTlToBr w="12700" cmpd="sng">
-                      <a:noFill/>
-                      <a:prstDash val="solid"/>
-                    </a:lnTlToBr>
-                    <a:lnBlToTr w="12700" cmpd="sng">
-                      <a:noFill/>
-                      <a:prstDash val="solid"/>
-                    </a:lnBlToTr>
-                    <a:solidFill>
-                      <a:schemeClr val="bg1"/>
-                    </a:solidFill>
-                  </a:tcPr>
-                </a:tc>
-                <a:tc>
-                  <a:txBody>
-                    <a:bodyPr/>
-                    <a:lstStyle/>
-                    <a:p>
-                      <a:endParaRPr lang="en-US" b="1" i="0" dirty="0">
-                        <a:solidFill>
-                          <a:schemeClr val="tx1"/>
-                        </a:solidFill>
-                        <a:latin typeface="Oracle Sans Semi Bold" panose="020B0503020204020204" pitchFamily="34" charset="0"/>
-                        <a:cs typeface="Oracle Sans Semi Bold" panose="020B0503020204020204" pitchFamily="34" charset="0"/>
-                      </a:endParaRPr>
-                    </a:p>
-                  </a:txBody>
-                  <a:tcPr>
-                    <a:lnL w="12700" cap="flat" cmpd="sng" algn="ctr">
-                      <a:noFill/>
-                      <a:prstDash val="solid"/>
-                      <a:round/>
-                      <a:headEnd type="none" w="med" len="med"/>
-                      <a:tailEnd type="none" w="med" len="med"/>
-                    </a:lnL>
-                    <a:lnR w="12700" cap="flat" cmpd="sng" algn="ctr">
-                      <a:solidFill>
-                        <a:schemeClr val="tx1"/>
-                      </a:solidFill>
-                      <a:prstDash val="solid"/>
-                      <a:round/>
-                      <a:headEnd type="none" w="med" len="med"/>
-                      <a:tailEnd type="none" w="med" len="med"/>
-                    </a:lnR>
-                    <a:lnT w="12700" cap="flat" cmpd="sng" algn="ctr">
-                      <a:solidFill>
-                        <a:schemeClr val="tx1"/>
-                      </a:solidFill>
-                      <a:prstDash val="solid"/>
-                      <a:round/>
-                      <a:headEnd type="none" w="med" len="med"/>
-                      <a:tailEnd type="none" w="med" len="med"/>
-                    </a:lnT>
-                    <a:lnB w="12700" cap="flat" cmpd="sng" algn="ctr">
-                      <a:solidFill>
-                        <a:schemeClr val="tx1"/>
-                      </a:solidFill>
-                      <a:prstDash val="solid"/>
-                      <a:round/>
-                      <a:headEnd type="none" w="med" len="med"/>
-                      <a:tailEnd type="none" w="med" len="med"/>
-                    </a:lnB>
-                    <a:lnTlToBr w="12700" cmpd="sng">
-                      <a:noFill/>
-                      <a:prstDash val="solid"/>
-                    </a:lnTlToBr>
-                    <a:lnBlToTr w="12700" cmpd="sng">
-                      <a:noFill/>
-                      <a:prstDash val="solid"/>
-                    </a:lnBlToTr>
-                    <a:solidFill>
-                      <a:schemeClr val="accent4">
-                        <a:lumMod val="20000"/>
-                        <a:lumOff val="80000"/>
-                      </a:schemeClr>
-                    </a:solidFill>
-                  </a:tcPr>
-                </a:tc>
-                <a:extLst>
-                  <a:ext uri="{0D108BD9-81ED-4DB2-BD59-A6C34878D82A}">
-                    <a16:rowId xmlns:a16="http://schemas.microsoft.com/office/drawing/2014/main" val="2426665619"/>
-                  </a:ext>
-                </a:extLst>
-              </a:tr>
               <a:tr h="1990457">
                 <a:tc>
                   <a:txBody>
@@ -4984,7 +4689,7 @@
         </p:nvGrpSpPr>
         <p:grpSpPr>
           <a:xfrm>
-            <a:off x="4192642" y="4928527"/>
+            <a:off x="4192642" y="4221940"/>
             <a:ext cx="4703702" cy="1737161"/>
             <a:chOff x="2930372" y="3837588"/>
             <a:chExt cx="4703702" cy="1737161"/>
@@ -5458,7 +5163,7 @@
         </p:nvSpPr>
         <p:spPr>
           <a:xfrm>
-            <a:off x="9346884" y="1236938"/>
+            <a:off x="9502749" y="1236938"/>
             <a:ext cx="944489" cy="369332"/>
           </a:xfrm>
           <a:prstGeom prst="rect">
@@ -5496,7 +5201,7 @@
         </p:nvSpPr>
         <p:spPr>
           <a:xfrm>
-            <a:off x="9346988" y="1786233"/>
+            <a:off x="9502853" y="1786233"/>
             <a:ext cx="1071127" cy="369332"/>
           </a:xfrm>
           <a:prstGeom prst="rect">
@@ -5534,7 +5239,7 @@
         </p:nvSpPr>
         <p:spPr>
           <a:xfrm>
-            <a:off x="9341326" y="2341292"/>
+            <a:off x="9497191" y="2341292"/>
             <a:ext cx="1071127" cy="369332"/>
           </a:xfrm>
           <a:prstGeom prst="rect">
@@ -5572,7 +5277,7 @@
         </p:nvSpPr>
         <p:spPr>
           <a:xfrm>
-            <a:off x="9341325" y="5070815"/>
+            <a:off x="9497190" y="4364228"/>
             <a:ext cx="1071127" cy="369332"/>
           </a:xfrm>
           <a:prstGeom prst="rect">
@@ -5610,7 +5315,7 @@
         </p:nvSpPr>
         <p:spPr>
           <a:xfrm>
-            <a:off x="9341325" y="5616127"/>
+            <a:off x="9497190" y="4909540"/>
             <a:ext cx="1451038" cy="369332"/>
           </a:xfrm>
           <a:prstGeom prst="rect">
@@ -5648,7 +5353,7 @@
         </p:nvSpPr>
         <p:spPr>
           <a:xfrm>
-            <a:off x="9352211" y="6139904"/>
+            <a:off x="9508076" y="5433317"/>
             <a:ext cx="1451038" cy="369332"/>
           </a:xfrm>
           <a:prstGeom prst="rect">
@@ -6315,7 +6020,7 @@
         </p:nvSpPr>
         <p:spPr>
           <a:xfrm>
-            <a:off x="9357873" y="2864786"/>
+            <a:off x="9513738" y="2864786"/>
             <a:ext cx="1451038" cy="369332"/>
           </a:xfrm>
           <a:prstGeom prst="rect">
@@ -6353,7 +6058,7 @@
         </p:nvSpPr>
         <p:spPr>
           <a:xfrm>
-            <a:off x="9352211" y="3419845"/>
+            <a:off x="9508076" y="3419845"/>
             <a:ext cx="1197764" cy="369332"/>
           </a:xfrm>
           <a:prstGeom prst="rect">
